--- a/deck/DigitalTogether_HR-Strategie.pptx
+++ b/deck/DigitalTogether_HR-Strategie.pptx
@@ -4652,7 +4652,7 @@
                 <a:ea typeface="Calibri" pitchFamily="34" charset="-122"/>
                 <a:cs typeface="Calibri" pitchFamily="34" charset="-120"/>
               </a:rPr>
-              <a:t>Wie verbinden wir die digitale Affinität jüngerer Mitarbeitender mit dem Erfahrungswissen langjähriger Kolleg:innen – strukturiert, freiwillig und messbar?</a:t>
+              <a:t>Wie verbinden wir die digitale Affinität digital affiner Mitarbeitender mit dem Erfahrungswissen arbeitserfahrener Kolleg:innen – strukturiert, freiwillig und messbar?</a:t>
             </a:r>
             <a:endParaRPr lang="en-US" sz="1600" dirty="0"/>
           </a:p>
@@ -6093,7 +6093,7 @@
                 <a:ea typeface="Trebuchet MS" pitchFamily="34" charset="-122"/>
                 <a:cs typeface="Trebuchet MS" pitchFamily="34" charset="-120"/>
               </a:rPr>
-              <a:t>Erfahrene Mitarbeitende  ·  „Oldies“</a:t>
+              <a:t>Erfahrene Mitarbeitende  ·  „Mentees“</a:t>
             </a:r>
             <a:endParaRPr lang="en-US" sz="1700" dirty="0"/>
           </a:p>
@@ -6863,7 +6863,7 @@
                 <a:ea typeface="Calibri" pitchFamily="34" charset="-122"/>
                 <a:cs typeface="Calibri" pitchFamily="34" charset="-120"/>
               </a:rPr>
-              <a:t>An- und Abmeldung als Oldie oder Mentor, Stärken und Lernwünsche erfassen</a:t>
+              <a:t>An- und Abmeldung als Mentee oder Mentor, Stärken und Lernwünsche erfassen</a:t>
             </a:r>
             <a:endParaRPr lang="en-US" sz="1200" dirty="0"/>
           </a:p>
@@ -8534,7 +8534,7 @@
                           <a:ea typeface="Calibri" pitchFamily="34" charset="-122"/>
                           <a:cs typeface="Calibri" pitchFamily="34" charset="-120"/>
                         </a:rPr>
-                        <a:t>Mentees (Oldies)</a:t>
+                        <a:t>Mentees</a:t>
                       </a:r>
                       <a:endParaRPr lang="en-US" sz="1350" dirty="0">
                         <a:latin typeface="Calibri" charset="0"/>
